--- a/ppt/Datascience09-Stats.pptx
+++ b/ppt/Datascience09-Stats.pptx
@@ -4319,9 +4319,10 @@
           <a:lstStyle/>
           <a:p>
             <a:r>
-              <a:rPr lang="fr-FR" dirty="0"/>
-              <a:t>Loi normal</a:t>
-            </a:r>
+              <a:rPr lang="fr-FR"/>
+              <a:t>Loi normale</a:t>
+            </a:r>
+            <a:endParaRPr lang="fr-FR" dirty="0"/>
           </a:p>
         </p:txBody>
       </p:sp>
